--- a/main-labs/basic-topics/two-computers/0105-kathara-lab_two-computers.pptx
+++ b/main-labs/basic-topics/two-computers/0105-kathara-lab_two-computers.pptx
@@ -3144,7 +3144,7 @@
               <a:pPr>
                 <a:defRPr/>
               </a:pPr>
-              <a:t>‹#›</a:t>
+              <a:t>‹N›</a:t>
             </a:fld>
             <a:endParaRPr lang="en-US" altLang="it-IT"/>
           </a:p>
@@ -3524,7 +3524,7 @@
               <a:pPr>
                 <a:defRPr/>
               </a:pPr>
-              <a:t>‹#›</a:t>
+              <a:t>‹N›</a:t>
             </a:fld>
             <a:endParaRPr lang="it-IT" altLang="it-IT"/>
           </a:p>
@@ -8539,6 +8539,243 @@
       </p:grpSpPr>
       <p:sp>
         <p:nvSpPr>
+          <p:cNvPr id="8" name="Content Placeholder 2">
+            <a:extLst>
+              <a:ext uri="{FF2B5EF4-FFF2-40B4-BE49-F238E27FC236}">
+                <a16:creationId xmlns:a16="http://schemas.microsoft.com/office/drawing/2014/main" id="{ACBBC5BF-5901-BE0E-76AB-7109E6BEC553}"/>
+              </a:ext>
+            </a:extLst>
+          </p:cNvPr>
+          <p:cNvSpPr txBox="1">
+            <a:spLocks/>
+          </p:cNvSpPr>
+          <p:nvPr/>
+        </p:nvSpPr>
+        <p:spPr bwMode="auto">
+          <a:xfrm>
+            <a:off x="609600" y="1412777"/>
+            <a:ext cx="10972800" cy="4713390"/>
+          </a:xfrm>
+          <a:prstGeom prst="rect">
+            <a:avLst/>
+          </a:prstGeom>
+          <a:noFill/>
+          <a:ln>
+            <a:noFill/>
+          </a:ln>
+          <a:extLst>
+            <a:ext uri="{909E8E84-426E-40DD-AFC4-6F175D3DCCD1}">
+              <a14:hiddenFill xmlns:a14="http://schemas.microsoft.com/office/drawing/2010/main">
+                <a:solidFill>
+                  <a:srgbClr val="FFFFFF"/>
+                </a:solidFill>
+              </a14:hiddenFill>
+            </a:ext>
+            <a:ext uri="{91240B29-F687-4F45-9708-019B960494DF}">
+              <a14:hiddenLine xmlns:a14="http://schemas.microsoft.com/office/drawing/2010/main" w="9525">
+                <a:solidFill>
+                  <a:srgbClr val="000000"/>
+                </a:solidFill>
+                <a:miter lim="800000"/>
+                <a:headEnd/>
+                <a:tailEnd/>
+              </a14:hiddenLine>
+            </a:ext>
+          </a:extLst>
+        </p:spPr>
+        <p:txBody>
+          <a:bodyPr vert="horz" wrap="square" lIns="91440" tIns="45720" rIns="91440" bIns="45720" numCol="1" anchor="t" anchorCtr="0" compatLnSpc="1">
+            <a:prstTxWarp prst="textNoShape">
+              <a:avLst/>
+            </a:prstTxWarp>
+          </a:bodyPr>
+          <a:lstStyle>
+            <a:lvl1pPr marL="342908" indent="-342908" algn="l" rtl="0" eaLnBrk="1" fontAlgn="base" hangingPunct="1">
+              <a:spcBef>
+                <a:spcPct val="20000"/>
+              </a:spcBef>
+              <a:spcAft>
+                <a:spcPct val="0"/>
+              </a:spcAft>
+              <a:buClr>
+                <a:schemeClr val="tx2"/>
+              </a:buClr>
+              <a:buSzPct val="70000"/>
+              <a:buFont typeface="Wingdings" panose="05000000000000000000" pitchFamily="2" charset="2"/>
+              <a:buChar char="n"/>
+              <a:defRPr sz="3200">
+                <a:solidFill>
+                  <a:schemeClr val="tx1"/>
+                </a:solidFill>
+                <a:latin typeface="+mn-lt"/>
+                <a:ea typeface="+mn-ea"/>
+                <a:cs typeface="+mn-cs"/>
+              </a:defRPr>
+            </a:lvl1pPr>
+            <a:lvl2pPr marL="742969" indent="-285757" algn="l" rtl="0" eaLnBrk="1" fontAlgn="base" hangingPunct="1">
+              <a:spcBef>
+                <a:spcPct val="20000"/>
+              </a:spcBef>
+              <a:spcAft>
+                <a:spcPct val="0"/>
+              </a:spcAft>
+              <a:buClr>
+                <a:schemeClr val="accent1"/>
+              </a:buClr>
+              <a:buSzPct val="70000"/>
+              <a:buFont typeface="Wingdings" panose="05000000000000000000" pitchFamily="2" charset="2"/>
+              <a:buChar char="n"/>
+              <a:defRPr sz="2800">
+                <a:solidFill>
+                  <a:schemeClr val="tx1"/>
+                </a:solidFill>
+                <a:latin typeface="+mn-lt"/>
+              </a:defRPr>
+            </a:lvl2pPr>
+            <a:lvl3pPr marL="1143028" indent="-228606" algn="l" rtl="0" eaLnBrk="1" fontAlgn="base" hangingPunct="1">
+              <a:spcBef>
+                <a:spcPct val="20000"/>
+              </a:spcBef>
+              <a:spcAft>
+                <a:spcPct val="0"/>
+              </a:spcAft>
+              <a:buClr>
+                <a:srgbClr val="66CC00"/>
+              </a:buClr>
+              <a:buSzPct val="70000"/>
+              <a:buFont typeface="Wingdings" panose="05000000000000000000" pitchFamily="2" charset="2"/>
+              <a:buChar char="n"/>
+              <a:defRPr sz="2400">
+                <a:solidFill>
+                  <a:schemeClr val="tx1"/>
+                </a:solidFill>
+                <a:latin typeface="+mn-lt"/>
+              </a:defRPr>
+            </a:lvl3pPr>
+            <a:lvl4pPr marL="1600240" indent="-228606" algn="l" rtl="0" eaLnBrk="1" fontAlgn="base" hangingPunct="1">
+              <a:spcBef>
+                <a:spcPct val="20000"/>
+              </a:spcBef>
+              <a:spcAft>
+                <a:spcPct val="0"/>
+              </a:spcAft>
+              <a:buSzPct val="70000"/>
+              <a:buFont typeface="Wingdings" panose="05000000000000000000" pitchFamily="2" charset="2"/>
+              <a:buChar char="l"/>
+              <a:defRPr sz="2000">
+                <a:solidFill>
+                  <a:schemeClr val="tx1"/>
+                </a:solidFill>
+                <a:latin typeface="+mn-lt"/>
+              </a:defRPr>
+            </a:lvl4pPr>
+            <a:lvl5pPr marL="2057452" indent="-228606" algn="l" rtl="0" eaLnBrk="1" fontAlgn="base" hangingPunct="1">
+              <a:spcBef>
+                <a:spcPct val="20000"/>
+              </a:spcBef>
+              <a:spcAft>
+                <a:spcPct val="0"/>
+              </a:spcAft>
+              <a:buFont typeface="Arial" panose="020B0604020202020204" pitchFamily="34" charset="0"/>
+              <a:buChar char="–"/>
+              <a:defRPr sz="2000">
+                <a:solidFill>
+                  <a:schemeClr val="tx1"/>
+                </a:solidFill>
+                <a:latin typeface="+mn-lt"/>
+              </a:defRPr>
+            </a:lvl5pPr>
+            <a:lvl6pPr marL="2514663" indent="-228606" algn="l" rtl="0" eaLnBrk="1" fontAlgn="base" hangingPunct="1">
+              <a:spcBef>
+                <a:spcPct val="20000"/>
+              </a:spcBef>
+              <a:spcAft>
+                <a:spcPct val="0"/>
+              </a:spcAft>
+              <a:buFont typeface="Arial" charset="0"/>
+              <a:buChar char="–"/>
+              <a:defRPr sz="2000">
+                <a:solidFill>
+                  <a:schemeClr val="tx1"/>
+                </a:solidFill>
+                <a:latin typeface="+mn-lt"/>
+              </a:defRPr>
+            </a:lvl6pPr>
+            <a:lvl7pPr marL="2971874" indent="-228606" algn="l" rtl="0" eaLnBrk="1" fontAlgn="base" hangingPunct="1">
+              <a:spcBef>
+                <a:spcPct val="20000"/>
+              </a:spcBef>
+              <a:spcAft>
+                <a:spcPct val="0"/>
+              </a:spcAft>
+              <a:buFont typeface="Arial" charset="0"/>
+              <a:buChar char="–"/>
+              <a:defRPr sz="2000">
+                <a:solidFill>
+                  <a:schemeClr val="tx1"/>
+                </a:solidFill>
+                <a:latin typeface="+mn-lt"/>
+              </a:defRPr>
+            </a:lvl7pPr>
+            <a:lvl8pPr marL="3429086" indent="-228606" algn="l" rtl="0" eaLnBrk="1" fontAlgn="base" hangingPunct="1">
+              <a:spcBef>
+                <a:spcPct val="20000"/>
+              </a:spcBef>
+              <a:spcAft>
+                <a:spcPct val="0"/>
+              </a:spcAft>
+              <a:buFont typeface="Arial" charset="0"/>
+              <a:buChar char="–"/>
+              <a:defRPr sz="2000">
+                <a:solidFill>
+                  <a:schemeClr val="tx1"/>
+                </a:solidFill>
+                <a:latin typeface="+mn-lt"/>
+              </a:defRPr>
+            </a:lvl8pPr>
+            <a:lvl9pPr marL="3886297" indent="-228606" algn="l" rtl="0" eaLnBrk="1" fontAlgn="base" hangingPunct="1">
+              <a:spcBef>
+                <a:spcPct val="20000"/>
+              </a:spcBef>
+              <a:spcAft>
+                <a:spcPct val="0"/>
+              </a:spcAft>
+              <a:buFont typeface="Arial" charset="0"/>
+              <a:buChar char="–"/>
+              <a:defRPr sz="2000">
+                <a:solidFill>
+                  <a:schemeClr val="tx1"/>
+                </a:solidFill>
+                <a:latin typeface="+mn-lt"/>
+              </a:defRPr>
+            </a:lvl9pPr>
+          </a:lstStyle>
+          <a:p>
+            <a:r>
+              <a:rPr lang="en-US" sz="2400" kern="0" dirty="0"/>
+              <a:t>An example of an equivalent version of the lab where MAC addresses are set in the .startup files. </a:t>
+            </a:r>
+          </a:p>
+          <a:p>
+            <a:r>
+              <a:rPr lang="en-US" sz="2400" kern="0" dirty="0"/>
+              <a:t>The only difference is that interfaces are created with random MAC addresses, which are changed by startup commands when devices start up.</a:t>
+            </a:r>
+          </a:p>
+          <a:p>
+            <a:endParaRPr lang="en-GB" sz="2400" kern="0" dirty="0"/>
+          </a:p>
+          <a:p>
+            <a:pPr marL="457212" lvl="1" indent="0">
+              <a:buFont typeface="Wingdings" panose="05000000000000000000" pitchFamily="2" charset="2"/>
+              <a:buNone/>
+            </a:pPr>
+            <a:endParaRPr lang="en-GB" kern="0" dirty="0"/>
+          </a:p>
+        </p:txBody>
+      </p:sp>
+      <p:sp>
+        <p:nvSpPr>
           <p:cNvPr id="2" name="Title 1">
             <a:extLst>
               <a:ext uri="{FF2B5EF4-FFF2-40B4-BE49-F238E27FC236}">
@@ -9741,7 +9978,7 @@
                 <a:rPr lang="pt-BR" altLang="it-IT" sz="1600" b="1" dirty="0">
                   <a:latin typeface="Courier New" panose="02070309020205020404" pitchFamily="49" charset="0"/>
                 </a:rPr>
-                <a:t>pc1[image]="kathara/base"</a:t>
+                <a:t>pc1[image]="kathara/core"</a:t>
               </a:r>
             </a:p>
             <a:p>
@@ -9806,7 +10043,7 @@
                 <a:rPr lang="pt-BR" altLang="it-IT" sz="1600" b="1" dirty="0">
                   <a:latin typeface="Courier New" panose="02070309020205020404" pitchFamily="49" charset="0"/>
                 </a:rPr>
-                <a:t>pc2[image]="kathara/base"</a:t>
+                <a:t>pc2[image]="kathara/core"</a:t>
               </a:r>
             </a:p>
             <a:p>
@@ -10042,243 +10279,6 @@
           </p:txBody>
         </p:sp>
       </p:grpSp>
-      <p:sp>
-        <p:nvSpPr>
-          <p:cNvPr id="8" name="Content Placeholder 2">
-            <a:extLst>
-              <a:ext uri="{FF2B5EF4-FFF2-40B4-BE49-F238E27FC236}">
-                <a16:creationId xmlns:a16="http://schemas.microsoft.com/office/drawing/2014/main" id="{ACBBC5BF-5901-BE0E-76AB-7109E6BEC553}"/>
-              </a:ext>
-            </a:extLst>
-          </p:cNvPr>
-          <p:cNvSpPr txBox="1">
-            <a:spLocks/>
-          </p:cNvSpPr>
-          <p:nvPr/>
-        </p:nvSpPr>
-        <p:spPr bwMode="auto">
-          <a:xfrm>
-            <a:off x="609600" y="1412777"/>
-            <a:ext cx="10972800" cy="4713390"/>
-          </a:xfrm>
-          <a:prstGeom prst="rect">
-            <a:avLst/>
-          </a:prstGeom>
-          <a:noFill/>
-          <a:ln>
-            <a:noFill/>
-          </a:ln>
-          <a:extLst>
-            <a:ext uri="{909E8E84-426E-40DD-AFC4-6F175D3DCCD1}">
-              <a14:hiddenFill xmlns:a14="http://schemas.microsoft.com/office/drawing/2010/main">
-                <a:solidFill>
-                  <a:srgbClr val="FFFFFF"/>
-                </a:solidFill>
-              </a14:hiddenFill>
-            </a:ext>
-            <a:ext uri="{91240B29-F687-4F45-9708-019B960494DF}">
-              <a14:hiddenLine xmlns:a14="http://schemas.microsoft.com/office/drawing/2010/main" w="9525">
-                <a:solidFill>
-                  <a:srgbClr val="000000"/>
-                </a:solidFill>
-                <a:miter lim="800000"/>
-                <a:headEnd/>
-                <a:tailEnd/>
-              </a14:hiddenLine>
-            </a:ext>
-          </a:extLst>
-        </p:spPr>
-        <p:txBody>
-          <a:bodyPr vert="horz" wrap="square" lIns="91440" tIns="45720" rIns="91440" bIns="45720" numCol="1" anchor="t" anchorCtr="0" compatLnSpc="1">
-            <a:prstTxWarp prst="textNoShape">
-              <a:avLst/>
-            </a:prstTxWarp>
-          </a:bodyPr>
-          <a:lstStyle>
-            <a:lvl1pPr marL="342908" indent="-342908" algn="l" rtl="0" eaLnBrk="1" fontAlgn="base" hangingPunct="1">
-              <a:spcBef>
-                <a:spcPct val="20000"/>
-              </a:spcBef>
-              <a:spcAft>
-                <a:spcPct val="0"/>
-              </a:spcAft>
-              <a:buClr>
-                <a:schemeClr val="tx2"/>
-              </a:buClr>
-              <a:buSzPct val="70000"/>
-              <a:buFont typeface="Wingdings" panose="05000000000000000000" pitchFamily="2" charset="2"/>
-              <a:buChar char="n"/>
-              <a:defRPr sz="3200">
-                <a:solidFill>
-                  <a:schemeClr val="tx1"/>
-                </a:solidFill>
-                <a:latin typeface="+mn-lt"/>
-                <a:ea typeface="+mn-ea"/>
-                <a:cs typeface="+mn-cs"/>
-              </a:defRPr>
-            </a:lvl1pPr>
-            <a:lvl2pPr marL="742969" indent="-285757" algn="l" rtl="0" eaLnBrk="1" fontAlgn="base" hangingPunct="1">
-              <a:spcBef>
-                <a:spcPct val="20000"/>
-              </a:spcBef>
-              <a:spcAft>
-                <a:spcPct val="0"/>
-              </a:spcAft>
-              <a:buClr>
-                <a:schemeClr val="accent1"/>
-              </a:buClr>
-              <a:buSzPct val="70000"/>
-              <a:buFont typeface="Wingdings" panose="05000000000000000000" pitchFamily="2" charset="2"/>
-              <a:buChar char="n"/>
-              <a:defRPr sz="2800">
-                <a:solidFill>
-                  <a:schemeClr val="tx1"/>
-                </a:solidFill>
-                <a:latin typeface="+mn-lt"/>
-              </a:defRPr>
-            </a:lvl2pPr>
-            <a:lvl3pPr marL="1143028" indent="-228606" algn="l" rtl="0" eaLnBrk="1" fontAlgn="base" hangingPunct="1">
-              <a:spcBef>
-                <a:spcPct val="20000"/>
-              </a:spcBef>
-              <a:spcAft>
-                <a:spcPct val="0"/>
-              </a:spcAft>
-              <a:buClr>
-                <a:srgbClr val="66CC00"/>
-              </a:buClr>
-              <a:buSzPct val="70000"/>
-              <a:buFont typeface="Wingdings" panose="05000000000000000000" pitchFamily="2" charset="2"/>
-              <a:buChar char="n"/>
-              <a:defRPr sz="2400">
-                <a:solidFill>
-                  <a:schemeClr val="tx1"/>
-                </a:solidFill>
-                <a:latin typeface="+mn-lt"/>
-              </a:defRPr>
-            </a:lvl3pPr>
-            <a:lvl4pPr marL="1600240" indent="-228606" algn="l" rtl="0" eaLnBrk="1" fontAlgn="base" hangingPunct="1">
-              <a:spcBef>
-                <a:spcPct val="20000"/>
-              </a:spcBef>
-              <a:spcAft>
-                <a:spcPct val="0"/>
-              </a:spcAft>
-              <a:buSzPct val="70000"/>
-              <a:buFont typeface="Wingdings" panose="05000000000000000000" pitchFamily="2" charset="2"/>
-              <a:buChar char="l"/>
-              <a:defRPr sz="2000">
-                <a:solidFill>
-                  <a:schemeClr val="tx1"/>
-                </a:solidFill>
-                <a:latin typeface="+mn-lt"/>
-              </a:defRPr>
-            </a:lvl4pPr>
-            <a:lvl5pPr marL="2057452" indent="-228606" algn="l" rtl="0" eaLnBrk="1" fontAlgn="base" hangingPunct="1">
-              <a:spcBef>
-                <a:spcPct val="20000"/>
-              </a:spcBef>
-              <a:spcAft>
-                <a:spcPct val="0"/>
-              </a:spcAft>
-              <a:buFont typeface="Arial" panose="020B0604020202020204" pitchFamily="34" charset="0"/>
-              <a:buChar char="–"/>
-              <a:defRPr sz="2000">
-                <a:solidFill>
-                  <a:schemeClr val="tx1"/>
-                </a:solidFill>
-                <a:latin typeface="+mn-lt"/>
-              </a:defRPr>
-            </a:lvl5pPr>
-            <a:lvl6pPr marL="2514663" indent="-228606" algn="l" rtl="0" eaLnBrk="1" fontAlgn="base" hangingPunct="1">
-              <a:spcBef>
-                <a:spcPct val="20000"/>
-              </a:spcBef>
-              <a:spcAft>
-                <a:spcPct val="0"/>
-              </a:spcAft>
-              <a:buFont typeface="Arial" charset="0"/>
-              <a:buChar char="–"/>
-              <a:defRPr sz="2000">
-                <a:solidFill>
-                  <a:schemeClr val="tx1"/>
-                </a:solidFill>
-                <a:latin typeface="+mn-lt"/>
-              </a:defRPr>
-            </a:lvl6pPr>
-            <a:lvl7pPr marL="2971874" indent="-228606" algn="l" rtl="0" eaLnBrk="1" fontAlgn="base" hangingPunct="1">
-              <a:spcBef>
-                <a:spcPct val="20000"/>
-              </a:spcBef>
-              <a:spcAft>
-                <a:spcPct val="0"/>
-              </a:spcAft>
-              <a:buFont typeface="Arial" charset="0"/>
-              <a:buChar char="–"/>
-              <a:defRPr sz="2000">
-                <a:solidFill>
-                  <a:schemeClr val="tx1"/>
-                </a:solidFill>
-                <a:latin typeface="+mn-lt"/>
-              </a:defRPr>
-            </a:lvl7pPr>
-            <a:lvl8pPr marL="3429086" indent="-228606" algn="l" rtl="0" eaLnBrk="1" fontAlgn="base" hangingPunct="1">
-              <a:spcBef>
-                <a:spcPct val="20000"/>
-              </a:spcBef>
-              <a:spcAft>
-                <a:spcPct val="0"/>
-              </a:spcAft>
-              <a:buFont typeface="Arial" charset="0"/>
-              <a:buChar char="–"/>
-              <a:defRPr sz="2000">
-                <a:solidFill>
-                  <a:schemeClr val="tx1"/>
-                </a:solidFill>
-                <a:latin typeface="+mn-lt"/>
-              </a:defRPr>
-            </a:lvl8pPr>
-            <a:lvl9pPr marL="3886297" indent="-228606" algn="l" rtl="0" eaLnBrk="1" fontAlgn="base" hangingPunct="1">
-              <a:spcBef>
-                <a:spcPct val="20000"/>
-              </a:spcBef>
-              <a:spcAft>
-                <a:spcPct val="0"/>
-              </a:spcAft>
-              <a:buFont typeface="Arial" charset="0"/>
-              <a:buChar char="–"/>
-              <a:defRPr sz="2000">
-                <a:solidFill>
-                  <a:schemeClr val="tx1"/>
-                </a:solidFill>
-                <a:latin typeface="+mn-lt"/>
-              </a:defRPr>
-            </a:lvl9pPr>
-          </a:lstStyle>
-          <a:p>
-            <a:r>
-              <a:rPr lang="en-US" sz="2400" kern="0" dirty="0"/>
-              <a:t>An example of an equivalent version of the lab where MAC addresses are set in the .startup files. </a:t>
-            </a:r>
-          </a:p>
-          <a:p>
-            <a:r>
-              <a:rPr lang="en-US" sz="2400" kern="0" dirty="0"/>
-              <a:t>The only difference is that interfaces are created with random MAC addresses, which are changed by startup commands when devices start up.</a:t>
-            </a:r>
-          </a:p>
-          <a:p>
-            <a:endParaRPr lang="en-GB" sz="2400" kern="0" dirty="0"/>
-          </a:p>
-          <a:p>
-            <a:pPr marL="457212" lvl="1" indent="0">
-              <a:buFont typeface="Wingdings" panose="05000000000000000000" pitchFamily="2" charset="2"/>
-              <a:buNone/>
-            </a:pPr>
-            <a:endParaRPr lang="en-GB" kern="0" dirty="0"/>
-          </a:p>
-        </p:txBody>
-      </p:sp>
     </p:spTree>
     <p:extLst>
       <p:ext uri="{BB962C8B-B14F-4D97-AF65-F5344CB8AC3E}">
@@ -37846,7 +37846,7 @@
                 <a:rPr lang="pt-BR" altLang="it-IT" sz="1600" b="1" dirty="0">
                   <a:latin typeface="Courier New" panose="02070309020205020404" pitchFamily="49" charset="0"/>
                 </a:rPr>
-                <a:t>pc1[image]="kathara/base"</a:t>
+                <a:t>pc1[image]="kathara/core"</a:t>
               </a:r>
             </a:p>
             <a:p>
@@ -37925,7 +37925,7 @@
                 <a:rPr lang="pt-BR" altLang="it-IT" sz="1600" b="1" dirty="0">
                   <a:latin typeface="Courier New" panose="02070309020205020404" pitchFamily="49" charset="0"/>
                 </a:rPr>
-                <a:t>pc2[image]="kathara/base"</a:t>
+                <a:t>pc2[image]="kathara/core"</a:t>
               </a:r>
             </a:p>
             <a:p>
@@ -38833,7 +38833,7 @@
                 <a:rPr lang="pt-BR" altLang="it-IT" sz="1600" b="1" dirty="0">
                   <a:latin typeface="Courier New" panose="02070309020205020404" pitchFamily="49" charset="0"/>
                 </a:rPr>
-                <a:t>pc1[image]="kathara/base"</a:t>
+                <a:t>pc1[image]="kathara/core"</a:t>
               </a:r>
             </a:p>
             <a:p>
@@ -38912,7 +38912,7 @@
                 <a:rPr lang="pt-BR" altLang="it-IT" sz="1600" b="1" dirty="0">
                   <a:latin typeface="Courier New" panose="02070309020205020404" pitchFamily="49" charset="0"/>
                 </a:rPr>
-                <a:t>pc2[image]="kathara/base"</a:t>
+                <a:t>pc2[image]="kathara/core"</a:t>
               </a:r>
             </a:p>
             <a:p>
@@ -39345,15 +39345,7 @@
             </a:pPr>
             <a:r>
               <a:rPr lang="en-US" altLang="it-IT" sz="2400" dirty="0"/>
-              <a:t>pc1 will use image "</a:t>
-            </a:r>
-            <a:r>
-              <a:rPr lang="en-US" altLang="it-IT" sz="2400" dirty="0" err="1"/>
-              <a:t>kathara</a:t>
-            </a:r>
-            <a:r>
-              <a:rPr lang="en-US" altLang="it-IT" sz="2400" dirty="0"/>
-              <a:t>/base"</a:t>
+              <a:t>pc1 will use image "kathara/core"</a:t>
             </a:r>
           </a:p>
         </p:txBody>
@@ -41873,15 +41865,7 @@
           <a:p>
             <a:r>
               <a:rPr lang="en-GB" dirty="0"/>
-              <a:t>the used image is "</a:t>
-            </a:r>
-            <a:r>
-              <a:rPr lang="en-GB" dirty="0" err="1"/>
-              <a:t>kathara</a:t>
-            </a:r>
-            <a:r>
-              <a:rPr lang="en-GB" dirty="0"/>
-              <a:t>/base"</a:t>
+              <a:t>the used image is "kathara/core"</a:t>
             </a:r>
           </a:p>
           <a:p>
@@ -43446,6 +43430,15 @@
 </file>
 
 <file path=customXml/item1.xml><?xml version="1.0" encoding="utf-8"?>
+<?mso-contentType ?>
+<FormTemplates xmlns="http://schemas.microsoft.com/sharepoint/v3/contenttype/forms">
+  <Display>DocumentLibraryForm</Display>
+  <Edit>DocumentLibraryForm</Edit>
+  <New>DocumentLibraryForm</New>
+</FormTemplates>
+</file>
+
+<file path=customXml/item2.xml><?xml version="1.0" encoding="utf-8"?>
 <p:properties xmlns:p="http://schemas.microsoft.com/office/2006/metadata/properties" xmlns:xsi="http://www.w3.org/2001/XMLSchema-instance" xmlns:pc="http://schemas.microsoft.com/office/infopath/2007/PartnerControls">
   <documentManagement>
     <TaxCatchAll xmlns="70582509-6503-4e16-ac53-25dcf1924cfe" xsi:nil="true"/>
@@ -43454,15 +43447,6 @@
     </lcf76f155ced4ddcb4097134ff3c332f>
   </documentManagement>
 </p:properties>
-</file>
-
-<file path=customXml/item2.xml><?xml version="1.0" encoding="utf-8"?>
-<?mso-contentType ?>
-<FormTemplates xmlns="http://schemas.microsoft.com/sharepoint/v3/contenttype/forms">
-  <Display>DocumentLibraryForm</Display>
-  <Edit>DocumentLibraryForm</Edit>
-  <New>DocumentLibraryForm</New>
-</FormTemplates>
 </file>
 
 <file path=customXml/item3.xml><?xml version="1.0" encoding="utf-8"?>
@@ -43709,20 +43693,20 @@
 </file>
 
 <file path=customXml/itemProps1.xml><?xml version="1.0" encoding="utf-8"?>
+<ds:datastoreItem xmlns:ds="http://schemas.openxmlformats.org/officeDocument/2006/customXml" ds:itemID="{9B9C3EC7-27AC-4C8D-85A7-50A0B101EB84}">
+  <ds:schemaRefs>
+    <ds:schemaRef ds:uri="http://schemas.microsoft.com/sharepoint/v3/contenttype/forms"/>
+  </ds:schemaRefs>
+</ds:datastoreItem>
+</file>
+
+<file path=customXml/itemProps2.xml><?xml version="1.0" encoding="utf-8"?>
 <ds:datastoreItem xmlns:ds="http://schemas.openxmlformats.org/officeDocument/2006/customXml" ds:itemID="{210698B1-0B92-4468-8E4C-F577BE605DE6}">
   <ds:schemaRefs>
     <ds:schemaRef ds:uri="http://schemas.microsoft.com/office/2006/metadata/properties"/>
     <ds:schemaRef ds:uri="http://schemas.microsoft.com/office/infopath/2007/PartnerControls"/>
     <ds:schemaRef ds:uri="70582509-6503-4e16-ac53-25dcf1924cfe"/>
     <ds:schemaRef ds:uri="faf22b50-f0a0-4d09-82e4-8fc7d61b3459"/>
-  </ds:schemaRefs>
-</ds:datastoreItem>
-</file>
-
-<file path=customXml/itemProps2.xml><?xml version="1.0" encoding="utf-8"?>
-<ds:datastoreItem xmlns:ds="http://schemas.openxmlformats.org/officeDocument/2006/customXml" ds:itemID="{9B9C3EC7-27AC-4C8D-85A7-50A0B101EB84}">
-  <ds:schemaRefs>
-    <ds:schemaRef ds:uri="http://schemas.microsoft.com/sharepoint/v3/contenttype/forms"/>
   </ds:schemaRefs>
 </ds:datastoreItem>
 </file>

--- a/main-labs/basic-topics/two-computers/0105-kathara-lab_two-computers.pptx
+++ b/main-labs/basic-topics/two-computers/0105-kathara-lab_two-computers.pptx
@@ -6844,7 +6844,7 @@
           <p:nvPr>
             <p:extLst>
               <p:ext uri="{D42A27DB-BD31-4B8C-83A1-F6EECF244321}">
-                <p14:modId xmlns:p14="http://schemas.microsoft.com/office/powerpoint/2010/main" val="2941448908"/>
+                <p14:modId xmlns:p14="http://schemas.microsoft.com/office/powerpoint/2010/main" val="4136788509"/>
               </p:ext>
             </p:extLst>
           </p:nvPr>
@@ -6982,7 +6982,7 @@
                         <a:tabLst/>
                       </a:pPr>
                       <a:r>
-                        <a:rPr kumimoji="0" lang="en-US" sz="1600" b="0" i="0" u="none" strike="noStrike" cap="none" normalizeH="0" baseline="0" dirty="0">
+                        <a:rPr kumimoji="0" lang="en-US" sz="1600" b="0" i="0" u="none" strike="noStrike" cap="none" normalizeH="0" baseline="0">
                           <a:ln>
                             <a:noFill/>
                           </a:ln>
@@ -6992,8 +6992,18 @@
                           <a:effectLst/>
                           <a:latin typeface="Tahoma" pitchFamily="34" charset="0"/>
                         </a:rPr>
-                        <a:t>2.0</a:t>
+                        <a:t>3.0</a:t>
                       </a:r>
+                      <a:endParaRPr kumimoji="0" lang="en-US" sz="1600" b="0" i="0" u="none" strike="noStrike" cap="none" normalizeH="0" baseline="0" dirty="0">
+                        <a:ln>
+                          <a:noFill/>
+                        </a:ln>
+                        <a:solidFill>
+                          <a:schemeClr val="tx1"/>
+                        </a:solidFill>
+                        <a:effectLst/>
+                        <a:latin typeface="Tahoma" pitchFamily="34" charset="0"/>
+                      </a:endParaRPr>
                     </a:p>
                   </a:txBody>
                   <a:tcPr marL="89992" marR="89992" marT="46769" marB="46769" horzOverflow="overflow">
@@ -43703,10 +43713,16 @@
 <file path=customXml/itemProps2.xml><?xml version="1.0" encoding="utf-8"?>
 <ds:datastoreItem xmlns:ds="http://schemas.openxmlformats.org/officeDocument/2006/customXml" ds:itemID="{210698B1-0B92-4468-8E4C-F577BE605DE6}">
   <ds:schemaRefs>
-    <ds:schemaRef ds:uri="http://schemas.microsoft.com/office/2006/metadata/properties"/>
+    <ds:schemaRef ds:uri="http://purl.org/dc/elements/1.1/"/>
+    <ds:schemaRef ds:uri="http://schemas.openxmlformats.org/package/2006/metadata/core-properties"/>
+    <ds:schemaRef ds:uri="http://purl.org/dc/dcmitype/"/>
+    <ds:schemaRef ds:uri="http://purl.org/dc/terms/"/>
+    <ds:schemaRef ds:uri="http://schemas.microsoft.com/office/2006/documentManagement/types"/>
     <ds:schemaRef ds:uri="http://schemas.microsoft.com/office/infopath/2007/PartnerControls"/>
+    <ds:schemaRef ds:uri="http://www.w3.org/XML/1998/namespace"/>
     <ds:schemaRef ds:uri="70582509-6503-4e16-ac53-25dcf1924cfe"/>
     <ds:schemaRef ds:uri="faf22b50-f0a0-4d09-82e4-8fc7d61b3459"/>
+    <ds:schemaRef ds:uri="http://schemas.microsoft.com/office/2006/metadata/properties"/>
   </ds:schemaRefs>
 </ds:datastoreItem>
 </file>

--- a/main-labs/basic-topics/two-computers/0105-kathara-lab_two-computers.pptx
+++ b/main-labs/basic-topics/two-computers/0105-kathara-lab_two-computers.pptx
@@ -3930,7 +3930,7 @@
             </a:pPr>
             <a:r>
               <a:rPr lang="en-US"/>
-              <a:t>last update: Sept 2024</a:t>
+              <a:t>last update: Oct 2026</a:t>
             </a:r>
             <a:endParaRPr lang="it-IT"/>
           </a:p>
@@ -4120,7 +4120,7 @@
             </a:pPr>
             <a:r>
               <a:rPr lang="en-US"/>
-              <a:t>last update: Sept 2024</a:t>
+              <a:t>last update: Oct 2026</a:t>
             </a:r>
             <a:endParaRPr lang="it-IT"/>
           </a:p>
@@ -4256,7 +4256,7 @@
             </a:pPr>
             <a:r>
               <a:rPr lang="en-US"/>
-              <a:t>last update: Sept 2024</a:t>
+              <a:t>last update: Oct 2026</a:t>
             </a:r>
             <a:endParaRPr lang="it-IT"/>
           </a:p>
@@ -4483,7 +4483,7 @@
             </a:pPr>
             <a:r>
               <a:rPr lang="en-US"/>
-              <a:t>last update: Sept 2024</a:t>
+              <a:t>last update: Oct 2026</a:t>
             </a:r>
             <a:endParaRPr lang="it-IT"/>
           </a:p>
@@ -4698,7 +4698,7 @@
             </a:pPr>
             <a:r>
               <a:rPr lang="en-US"/>
-              <a:t>last update: Sept 2024</a:t>
+              <a:t>last update: Oct 2026</a:t>
             </a:r>
             <a:endParaRPr lang="it-IT"/>
           </a:p>
@@ -4996,7 +4996,7 @@
             </a:pPr>
             <a:r>
               <a:rPr lang="en-US"/>
-              <a:t>last update: Sept 2024</a:t>
+              <a:t>last update: Oct 2026</a:t>
             </a:r>
             <a:endParaRPr lang="it-IT"/>
           </a:p>
@@ -5124,7 +5124,7 @@
             </a:pPr>
             <a:r>
               <a:rPr lang="en-US"/>
-              <a:t>last update: Sept 2024</a:t>
+              <a:t>last update: Oct 2026</a:t>
             </a:r>
             <a:endParaRPr lang="it-IT"/>
           </a:p>
@@ -5229,7 +5229,7 @@
             </a:pPr>
             <a:r>
               <a:rPr lang="en-US"/>
-              <a:t>last update: Sept 2024</a:t>
+              <a:t>last update: Oct 2026</a:t>
             </a:r>
             <a:endParaRPr lang="it-IT"/>
           </a:p>
@@ -5516,7 +5516,7 @@
             </a:pPr>
             <a:r>
               <a:rPr lang="en-US"/>
-              <a:t>last update: Sept 2024</a:t>
+              <a:t>last update: Oct 2026</a:t>
             </a:r>
             <a:endParaRPr lang="it-IT"/>
           </a:p>
@@ -5784,7 +5784,7 @@
             </a:pPr>
             <a:r>
               <a:rPr lang="en-US"/>
-              <a:t>last update: Sept 2024</a:t>
+              <a:t>last update: Oct 2026</a:t>
             </a:r>
             <a:endParaRPr lang="it-IT"/>
           </a:p>
@@ -6073,7 +6073,7 @@
             </a:pPr>
             <a:r>
               <a:rPr lang="en-US"/>
-              <a:t>last update: Sept 2024</a:t>
+              <a:t>last update: Oct 2026</a:t>
             </a:r>
             <a:endParaRPr lang="it-IT"/>
           </a:p>
@@ -8080,7 +8080,7 @@
             </a:pPr>
             <a:r>
               <a:rPr lang="en-US"/>
-              <a:t>last update: Sept 2024</a:t>
+              <a:t>last update: Oct 2026</a:t>
             </a:r>
             <a:endParaRPr lang="it-IT"/>
           </a:p>
@@ -8284,7 +8284,7 @@
             </a:pPr>
             <a:r>
               <a:rPr lang="en-US"/>
-              <a:t>last update: Sept 2024</a:t>
+              <a:t>last update: Oct 2026</a:t>
             </a:r>
             <a:endParaRPr lang="it-IT"/>
           </a:p>
@@ -8480,7 +8480,7 @@
             </a:pPr>
             <a:r>
               <a:rPr lang="en-US"/>
-              <a:t>last update: Sept 2024</a:t>
+              <a:t>last update: Oct 2026</a:t>
             </a:r>
             <a:endParaRPr lang="it-IT"/>
           </a:p>
@@ -8838,7 +8838,7 @@
             </a:pPr>
             <a:r>
               <a:rPr lang="en-US"/>
-              <a:t>last update: Sept 2024</a:t>
+              <a:t>last update: Oct 2026</a:t>
             </a:r>
             <a:endParaRPr lang="it-IT"/>
           </a:p>
@@ -10373,7 +10373,7 @@
             </a:pPr>
             <a:r>
               <a:rPr lang="en-US"/>
-              <a:t>last update: Sept 2024</a:t>
+              <a:t>last update: Oct 2026</a:t>
             </a:r>
             <a:endParaRPr lang="it-IT"/>
           </a:p>
@@ -10566,7 +10566,7 @@
             </a:pPr>
             <a:r>
               <a:rPr lang="en-US"/>
-              <a:t>last update: Sept 2024</a:t>
+              <a:t>last update: Oct 2026</a:t>
             </a:r>
             <a:endParaRPr lang="it-IT"/>
           </a:p>
@@ -10731,7 +10731,7 @@
             </a:pPr>
             <a:r>
               <a:rPr lang="en-US"/>
-              <a:t>last update: Sept 2024</a:t>
+              <a:t>last update: Oct 2026</a:t>
             </a:r>
             <a:endParaRPr lang="it-IT"/>
           </a:p>
@@ -12638,7 +12638,7 @@
             </a:pPr>
             <a:r>
               <a:rPr lang="en-US"/>
-              <a:t>last update: Sept 2024</a:t>
+              <a:t>last update: Oct 2026</a:t>
             </a:r>
             <a:endParaRPr lang="it-IT"/>
           </a:p>
@@ -13206,7 +13206,7 @@
             </a:pPr>
             <a:r>
               <a:rPr lang="en-US"/>
-              <a:t>last update: Sept 2024</a:t>
+              <a:t>last update: Oct 2026</a:t>
             </a:r>
             <a:endParaRPr lang="it-IT"/>
           </a:p>
@@ -14868,7 +14868,7 @@
             </a:pPr>
             <a:r>
               <a:rPr lang="en-US"/>
-              <a:t>last update: Sept 2024</a:t>
+              <a:t>last update: Oct 2026</a:t>
             </a:r>
             <a:endParaRPr lang="it-IT"/>
           </a:p>
@@ -16278,8 +16278,8 @@
               <a:defRPr/>
             </a:pPr>
             <a:r>
-              <a:rPr lang="en-US" dirty="0"/>
-              <a:t>last update: Sept 2024</a:t>
+              <a:rPr lang="en-US"/>
+              <a:t>last update: Oct 2026</a:t>
             </a:r>
             <a:endParaRPr lang="it-IT" dirty="0"/>
           </a:p>
@@ -16602,7 +16602,7 @@
             </a:pPr>
             <a:r>
               <a:rPr lang="en-US"/>
-              <a:t>last update: Sept 2024</a:t>
+              <a:t>last update: Oct 2026</a:t>
             </a:r>
             <a:endParaRPr lang="it-IT"/>
           </a:p>
@@ -16788,7 +16788,7 @@
             </a:pPr>
             <a:r>
               <a:rPr lang="en-US"/>
-              <a:t>last update: Sept 2024</a:t>
+              <a:t>last update: Oct 2026</a:t>
             </a:r>
             <a:endParaRPr lang="it-IT"/>
           </a:p>
@@ -16950,7 +16950,7 @@
             </a:pPr>
             <a:r>
               <a:rPr lang="en-US"/>
-              <a:t>last update: Sept 2024</a:t>
+              <a:t>last update: Oct 2026</a:t>
             </a:r>
             <a:endParaRPr lang="it-IT"/>
           </a:p>
@@ -17113,7 +17113,7 @@
             </a:pPr>
             <a:r>
               <a:rPr lang="en-US"/>
-              <a:t>last update: Sept 2024</a:t>
+              <a:t>last update: Oct 2026</a:t>
             </a:r>
             <a:endParaRPr lang="it-IT"/>
           </a:p>
@@ -17297,7 +17297,7 @@
             </a:pPr>
             <a:r>
               <a:rPr lang="en-US"/>
-              <a:t>last update: Sept 2024</a:t>
+              <a:t>last update: Oct 2026</a:t>
             </a:r>
             <a:endParaRPr lang="it-IT"/>
           </a:p>
@@ -17478,7 +17478,7 @@
             </a:pPr>
             <a:r>
               <a:rPr lang="en-US"/>
-              <a:t>last update: Sept 2024</a:t>
+              <a:t>last update: Oct 2026</a:t>
             </a:r>
             <a:endParaRPr lang="it-IT"/>
           </a:p>
@@ -19217,7 +19217,7 @@
             </a:pPr>
             <a:r>
               <a:rPr lang="en-US"/>
-              <a:t>last update: Sept 2024</a:t>
+              <a:t>last update: Oct 2026</a:t>
             </a:r>
             <a:endParaRPr lang="it-IT"/>
           </a:p>
@@ -19888,7 +19888,7 @@
             </a:pPr>
             <a:r>
               <a:rPr lang="en-US"/>
-              <a:t>last update: Sept 2024</a:t>
+              <a:t>last update: Oct 2026</a:t>
             </a:r>
             <a:endParaRPr lang="it-IT"/>
           </a:p>
@@ -20049,7 +20049,7 @@
             </a:pPr>
             <a:r>
               <a:rPr lang="en-US"/>
-              <a:t>last update: Sept 2024</a:t>
+              <a:t>last update: Oct 2026</a:t>
             </a:r>
             <a:endParaRPr lang="it-IT"/>
           </a:p>
@@ -24852,7 +24852,7 @@
             </a:pPr>
             <a:r>
               <a:rPr lang="en-US"/>
-              <a:t>last update: Sept 2024</a:t>
+              <a:t>last update: Oct 2026</a:t>
             </a:r>
             <a:endParaRPr lang="it-IT"/>
           </a:p>
@@ -26594,7 +26594,7 @@
             </a:pPr>
             <a:r>
               <a:rPr lang="en-US"/>
-              <a:t>last update: Sept 2024</a:t>
+              <a:t>last update: Oct 2026</a:t>
             </a:r>
             <a:endParaRPr lang="it-IT"/>
           </a:p>
@@ -31276,7 +31276,7 @@
             </a:pPr>
             <a:r>
               <a:rPr lang="en-US"/>
-              <a:t>last update: Sept 2024</a:t>
+              <a:t>last update: Oct 2026</a:t>
             </a:r>
             <a:endParaRPr lang="it-IT"/>
           </a:p>
@@ -36452,7 +36452,7 @@
             </a:pPr>
             <a:r>
               <a:rPr lang="en-US"/>
-              <a:t>last update: Sept 2024</a:t>
+              <a:t>last update: Oct 2026</a:t>
             </a:r>
             <a:endParaRPr lang="it-IT"/>
           </a:p>
@@ -36630,7 +36630,7 @@
             </a:pPr>
             <a:r>
               <a:rPr lang="en-US"/>
-              <a:t>last update: Sept 2024</a:t>
+              <a:t>last update: Oct 2026</a:t>
             </a:r>
             <a:endParaRPr lang="it-IT"/>
           </a:p>
@@ -36824,7 +36824,7 @@
             </a:pPr>
             <a:r>
               <a:rPr lang="en-US"/>
-              <a:t>last update: Sept 2024</a:t>
+              <a:t>last update: Oct 2026</a:t>
             </a:r>
             <a:endParaRPr lang="it-IT"/>
           </a:p>
@@ -37019,7 +37019,7 @@
             </a:pPr>
             <a:r>
               <a:rPr lang="en-US"/>
-              <a:t>last update: Sept 2024</a:t>
+              <a:t>last update: Oct 2026</a:t>
             </a:r>
             <a:endParaRPr lang="it-IT"/>
           </a:p>
@@ -37207,7 +37207,7 @@
             </a:pPr>
             <a:r>
               <a:rPr lang="en-US"/>
-              <a:t>last update: Sept 2024</a:t>
+              <a:t>last update: Oct 2026</a:t>
             </a:r>
             <a:endParaRPr lang="it-IT"/>
           </a:p>
@@ -37392,7 +37392,7 @@
             </a:pPr>
             <a:r>
               <a:rPr lang="en-US"/>
-              <a:t>last update: Sept 2024</a:t>
+              <a:t>last update: Oct 2026</a:t>
             </a:r>
             <a:endParaRPr lang="it-IT"/>
           </a:p>
@@ -37568,7 +37568,7 @@
             </a:pPr>
             <a:r>
               <a:rPr lang="en-US"/>
-              <a:t>last update: Sept 2024</a:t>
+              <a:t>last update: Oct 2026</a:t>
             </a:r>
             <a:endParaRPr lang="it-IT"/>
           </a:p>
@@ -38555,7 +38555,7 @@
             </a:pPr>
             <a:r>
               <a:rPr lang="en-US"/>
-              <a:t>last update: Sept 2024</a:t>
+              <a:t>last update: Oct 2026</a:t>
             </a:r>
             <a:endParaRPr lang="it-IT"/>
           </a:p>
@@ -39770,7 +39770,7 @@
             </a:pPr>
             <a:r>
               <a:rPr lang="en-US"/>
-              <a:t>last update: Sept 2024</a:t>
+              <a:t>last update: Oct 2026</a:t>
             </a:r>
             <a:endParaRPr lang="it-IT"/>
           </a:p>
@@ -39970,7 +39970,7 @@
             </a:pPr>
             <a:r>
               <a:rPr lang="en-US" altLang="it-IT"/>
-              <a:t>last update: Sept 2024</a:t>
+              <a:t>last update: Oct 2026</a:t>
             </a:r>
             <a:endParaRPr lang="it-IT" altLang="it-IT"/>
           </a:p>
@@ -41814,7 +41814,7 @@
             </a:pPr>
             <a:r>
               <a:rPr lang="en-US"/>
-              <a:t>last update: Sept 2024</a:t>
+              <a:t>last update: Oct 2026</a:t>
             </a:r>
             <a:endParaRPr lang="it-IT"/>
           </a:p>
@@ -41984,7 +41984,7 @@
             </a:pPr>
             <a:r>
               <a:rPr lang="en-US"/>
-              <a:t>last update: Sept 2024</a:t>
+              <a:t>last update: Oct 2026</a:t>
             </a:r>
             <a:endParaRPr lang="it-IT"/>
           </a:p>
@@ -43440,26 +43440,6 @@
 </file>
 
 <file path=customXml/item1.xml><?xml version="1.0" encoding="utf-8"?>
-<?mso-contentType ?>
-<FormTemplates xmlns="http://schemas.microsoft.com/sharepoint/v3/contenttype/forms">
-  <Display>DocumentLibraryForm</Display>
-  <Edit>DocumentLibraryForm</Edit>
-  <New>DocumentLibraryForm</New>
-</FormTemplates>
-</file>
-
-<file path=customXml/item2.xml><?xml version="1.0" encoding="utf-8"?>
-<p:properties xmlns:p="http://schemas.microsoft.com/office/2006/metadata/properties" xmlns:xsi="http://www.w3.org/2001/XMLSchema-instance" xmlns:pc="http://schemas.microsoft.com/office/infopath/2007/PartnerControls">
-  <documentManagement>
-    <TaxCatchAll xmlns="70582509-6503-4e16-ac53-25dcf1924cfe" xsi:nil="true"/>
-    <lcf76f155ced4ddcb4097134ff3c332f xmlns="faf22b50-f0a0-4d09-82e4-8fc7d61b3459">
-      <Terms xmlns="http://schemas.microsoft.com/office/infopath/2007/PartnerControls"/>
-    </lcf76f155ced4ddcb4097134ff3c332f>
-  </documentManagement>
-</p:properties>
-</file>
-
-<file path=customXml/item3.xml><?xml version="1.0" encoding="utf-8"?>
 <ct:contentTypeSchema xmlns:ct="http://schemas.microsoft.com/office/2006/metadata/contentType" xmlns:ma="http://schemas.microsoft.com/office/2006/metadata/properties/metaAttributes" ct:_="" ma:_="" ma:contentTypeName="Document" ma:contentTypeID="0x0101001C5B3E3AE4FA4C4F9C1F8597543882A5" ma:contentTypeVersion="17" ma:contentTypeDescription="Create a new document." ma:contentTypeScope="" ma:versionID="4815d3abbfc0877e78553e5fbd222dd0">
   <xsd:schema xmlns:xsd="http://www.w3.org/2001/XMLSchema" xmlns:xs="http://www.w3.org/2001/XMLSchema" xmlns:p="http://schemas.microsoft.com/office/2006/metadata/properties" xmlns:ns2="faf22b50-f0a0-4d09-82e4-8fc7d61b3459" xmlns:ns3="70582509-6503-4e16-ac53-25dcf1924cfe" targetNamespace="http://schemas.microsoft.com/office/2006/metadata/properties" ma:root="true" ma:fieldsID="c30c814db75800452b5622f0094398ee" ns2:_="" ns3:_="">
     <xsd:import namespace="faf22b50-f0a0-4d09-82e4-8fc7d61b3459"/>
@@ -43702,10 +43682,41 @@
 </ct:contentTypeSchema>
 </file>
 
+<file path=customXml/item2.xml><?xml version="1.0" encoding="utf-8"?>
+<p:properties xmlns:p="http://schemas.microsoft.com/office/2006/metadata/properties" xmlns:xsi="http://www.w3.org/2001/XMLSchema-instance" xmlns:pc="http://schemas.microsoft.com/office/infopath/2007/PartnerControls">
+  <documentManagement>
+    <TaxCatchAll xmlns="70582509-6503-4e16-ac53-25dcf1924cfe" xsi:nil="true"/>
+    <lcf76f155ced4ddcb4097134ff3c332f xmlns="faf22b50-f0a0-4d09-82e4-8fc7d61b3459">
+      <Terms xmlns="http://schemas.microsoft.com/office/infopath/2007/PartnerControls"/>
+    </lcf76f155ced4ddcb4097134ff3c332f>
+  </documentManagement>
+</p:properties>
+</file>
+
+<file path=customXml/item3.xml><?xml version="1.0" encoding="utf-8"?>
+<?mso-contentType ?>
+<FormTemplates xmlns="http://schemas.microsoft.com/sharepoint/v3/contenttype/forms">
+  <Display>DocumentLibraryForm</Display>
+  <Edit>DocumentLibraryForm</Edit>
+  <New>DocumentLibraryForm</New>
+</FormTemplates>
+</file>
+
 <file path=customXml/itemProps1.xml><?xml version="1.0" encoding="utf-8"?>
-<ds:datastoreItem xmlns:ds="http://schemas.openxmlformats.org/officeDocument/2006/customXml" ds:itemID="{9B9C3EC7-27AC-4C8D-85A7-50A0B101EB84}">
+<ds:datastoreItem xmlns:ds="http://schemas.openxmlformats.org/officeDocument/2006/customXml" ds:itemID="{597CEDAA-0CDC-486F-A510-CFDFA8B4F222}">
   <ds:schemaRefs>
-    <ds:schemaRef ds:uri="http://schemas.microsoft.com/sharepoint/v3/contenttype/forms"/>
+    <ds:schemaRef ds:uri="http://schemas.microsoft.com/office/2006/metadata/contentType"/>
+    <ds:schemaRef ds:uri="http://schemas.microsoft.com/office/2006/metadata/properties/metaAttributes"/>
+    <ds:schemaRef ds:uri="http://www.w3.org/2001/XMLSchema"/>
+    <ds:schemaRef ds:uri="http://schemas.microsoft.com/office/2006/metadata/properties"/>
+    <ds:schemaRef ds:uri="faf22b50-f0a0-4d09-82e4-8fc7d61b3459"/>
+    <ds:schemaRef ds:uri="70582509-6503-4e16-ac53-25dcf1924cfe"/>
+    <ds:schemaRef ds:uri="http://schemas.microsoft.com/office/2006/documentManagement/types"/>
+    <ds:schemaRef ds:uri="http://schemas.microsoft.com/office/infopath/2007/PartnerControls"/>
+    <ds:schemaRef ds:uri="http://schemas.openxmlformats.org/package/2006/metadata/core-properties"/>
+    <ds:schemaRef ds:uri="http://purl.org/dc/elements/1.1/"/>
+    <ds:schemaRef ds:uri="http://purl.org/dc/terms/"/>
+    <ds:schemaRef ds:uri="http://schemas.microsoft.com/internal/obd"/>
   </ds:schemaRefs>
 </ds:datastoreItem>
 </file>
@@ -43728,20 +43739,9 @@
 </file>
 
 <file path=customXml/itemProps3.xml><?xml version="1.0" encoding="utf-8"?>
-<ds:datastoreItem xmlns:ds="http://schemas.openxmlformats.org/officeDocument/2006/customXml" ds:itemID="{597CEDAA-0CDC-486F-A510-CFDFA8B4F222}">
+<ds:datastoreItem xmlns:ds="http://schemas.openxmlformats.org/officeDocument/2006/customXml" ds:itemID="{9B9C3EC7-27AC-4C8D-85A7-50A0B101EB84}">
   <ds:schemaRefs>
-    <ds:schemaRef ds:uri="http://schemas.microsoft.com/office/2006/metadata/contentType"/>
-    <ds:schemaRef ds:uri="http://schemas.microsoft.com/office/2006/metadata/properties/metaAttributes"/>
-    <ds:schemaRef ds:uri="http://www.w3.org/2001/XMLSchema"/>
-    <ds:schemaRef ds:uri="http://schemas.microsoft.com/office/2006/metadata/properties"/>
-    <ds:schemaRef ds:uri="faf22b50-f0a0-4d09-82e4-8fc7d61b3459"/>
-    <ds:schemaRef ds:uri="70582509-6503-4e16-ac53-25dcf1924cfe"/>
-    <ds:schemaRef ds:uri="http://schemas.microsoft.com/office/2006/documentManagement/types"/>
-    <ds:schemaRef ds:uri="http://schemas.microsoft.com/office/infopath/2007/PartnerControls"/>
-    <ds:schemaRef ds:uri="http://schemas.openxmlformats.org/package/2006/metadata/core-properties"/>
-    <ds:schemaRef ds:uri="http://purl.org/dc/elements/1.1/"/>
-    <ds:schemaRef ds:uri="http://purl.org/dc/terms/"/>
-    <ds:schemaRef ds:uri="http://schemas.microsoft.com/internal/obd"/>
+    <ds:schemaRef ds:uri="http://schemas.microsoft.com/sharepoint/v3/contenttype/forms"/>
   </ds:schemaRefs>
 </ds:datastoreItem>
 </file>